--- a/docs/工业增加值实时预测模型及系统开发0904.pptx
+++ b/docs/工业增加值实时预测模型及系统开发0904.pptx
@@ -12018,7 +12018,7 @@
           <a:p>
             <a:fld id="{D7BBE6FB-4983-42F5-B216-1A2ADEE7DF7A}" type="datetimeFigureOut">
               <a:rPr lang="zh-CN" altLang="en-US" smtClean="0"/>
-              <a:t>2025/9/5</a:t>
+              <a:t>2026/5/9</a:t>
             </a:fld>
             <a:endParaRPr lang="zh-CN" altLang="en-US"/>
           </a:p>
@@ -14386,7 +14386,7 @@
         </p:nvSpPr>
         <p:spPr>
           <a:xfrm>
-            <a:off x="4900168" y="5905161"/>
+            <a:off x="4813358" y="6077037"/>
             <a:ext cx="1401061" cy="338554"/>
           </a:xfrm>
           <a:prstGeom prst="rect">
@@ -14512,7 +14512,7 @@
         </p:nvSpPr>
         <p:spPr>
           <a:xfrm>
-            <a:off x="1819275" y="5234101"/>
+            <a:off x="3856419" y="5122126"/>
             <a:ext cx="3600449" cy="369332"/>
           </a:xfrm>
           <a:prstGeom prst="rect">
@@ -14550,114 +14550,6 @@
           </a:p>
         </p:txBody>
       </p:sp>
-      <mc:AlternateContent xmlns:mc="http://schemas.openxmlformats.org/markup-compatibility/2006" xmlns:a14="http://schemas.microsoft.com/office/drawing/2010/main">
-        <mc:Choice Requires="a14">
-          <p:sp>
-            <p:nvSpPr>
-              <p:cNvPr id="10" name="文本框 9">
-                <a:extLst>
-                  <a:ext uri="{FF2B5EF4-FFF2-40B4-BE49-F238E27FC236}">
-                    <a16:creationId xmlns:a16="http://schemas.microsoft.com/office/drawing/2014/main" id="{A6EAB1CB-7C4A-9744-FB14-5483E0EF476A}"/>
-                  </a:ext>
-                </a:extLst>
-              </p:cNvPr>
-              <p:cNvSpPr txBox="1"/>
-              <p:nvPr/>
-            </p:nvSpPr>
-            <p:spPr>
-              <a:xfrm>
-                <a:off x="5305109" y="5248774"/>
-                <a:ext cx="229230" cy="276999"/>
-              </a:xfrm>
-              <a:prstGeom prst="rect">
-                <a:avLst/>
-              </a:prstGeom>
-              <a:noFill/>
-            </p:spPr>
-            <p:txBody>
-              <a:bodyPr wrap="none" lIns="0" tIns="0" rIns="0" bIns="0" rtlCol="0">
-                <a:spAutoFit/>
-              </a:bodyPr>
-              <a:lstStyle/>
-              <a:p>
-                <a:pPr/>
-                <a14:m>
-                  <m:oMathPara xmlns:m="http://schemas.openxmlformats.org/officeDocument/2006/math">
-                    <m:oMathParaPr>
-                      <m:jc m:val="centerGroup"/>
-                    </m:oMathParaPr>
-                    <m:oMath xmlns:m="http://schemas.openxmlformats.org/officeDocument/2006/math">
-                      <m:r>
-                        <a:rPr lang="en-US" altLang="zh-CN" i="0" smtClean="0">
-                          <a:solidFill>
-                            <a:schemeClr val="bg1">
-                              <a:lumMod val="50000"/>
-                            </a:schemeClr>
-                          </a:solidFill>
-                          <a:latin typeface="Cambria Math" panose="02040503050406030204" pitchFamily="18" charset="0"/>
-                          <a:ea typeface="Cambria Math" panose="02040503050406030204" pitchFamily="18" charset="0"/>
-                        </a:rPr>
-                        <m:t>×</m:t>
-                      </m:r>
-                    </m:oMath>
-                  </m:oMathPara>
-                </a14:m>
-                <a:endParaRPr lang="zh-CN" altLang="en-US" dirty="0">
-                  <a:solidFill>
-                    <a:schemeClr val="bg1">
-                      <a:lumMod val="50000"/>
-                    </a:schemeClr>
-                  </a:solidFill>
-                </a:endParaRPr>
-              </a:p>
-            </p:txBody>
-          </p:sp>
-        </mc:Choice>
-        <mc:Fallback xmlns="">
-          <p:sp>
-            <p:nvSpPr>
-              <p:cNvPr id="10" name="文本框 9">
-                <a:extLst>
-                  <a:ext uri="{FF2B5EF4-FFF2-40B4-BE49-F238E27FC236}">
-                    <a16:creationId xmlns:a16="http://schemas.microsoft.com/office/drawing/2014/main" id="{A6EAB1CB-7C4A-9744-FB14-5483E0EF476A}"/>
-                  </a:ext>
-                </a:extLst>
-              </p:cNvPr>
-              <p:cNvSpPr txBox="1">
-                <a:spLocks noRot="1" noChangeAspect="1" noMove="1" noResize="1" noEditPoints="1" noAdjustHandles="1" noChangeArrowheads="1" noChangeShapeType="1" noTextEdit="1"/>
-              </p:cNvSpPr>
-              <p:nvPr/>
-            </p:nvSpPr>
-            <p:spPr>
-              <a:xfrm>
-                <a:off x="5305109" y="5248774"/>
-                <a:ext cx="229230" cy="276999"/>
-              </a:xfrm>
-              <a:prstGeom prst="rect">
-                <a:avLst/>
-              </a:prstGeom>
-              <a:blipFill>
-                <a:blip r:embed="rId2"/>
-                <a:stretch>
-                  <a:fillRect l="-15789" r="-13158" b="-4444"/>
-                </a:stretch>
-              </a:blipFill>
-            </p:spPr>
-            <p:txBody>
-              <a:bodyPr/>
-              <a:lstStyle/>
-              <a:p>
-                <a:r>
-                  <a:rPr lang="zh-CN" altLang="en-US">
-                    <a:noFill/>
-                  </a:rPr>
-                  <a:t> </a:t>
-                </a:r>
-              </a:p>
-            </p:txBody>
-          </p:sp>
-        </mc:Fallback>
-      </mc:AlternateContent>
       <p:sp>
         <p:nvSpPr>
           <p:cNvPr id="11" name="文本框 10">
@@ -14672,7 +14564,7 @@
         </p:nvSpPr>
         <p:spPr>
           <a:xfrm>
-            <a:off x="5600699" y="5234101"/>
+            <a:off x="4645788" y="5631412"/>
             <a:ext cx="4772026" cy="369332"/>
           </a:xfrm>
           <a:prstGeom prst="rect">
@@ -14696,7 +14588,7 @@
                 <a:latin typeface="方正小标宋_GBK" panose="03000509000000000000" pitchFamily="65" charset="-122"/>
                 <a:ea typeface="方正小标宋_GBK" panose="03000509000000000000" pitchFamily="65" charset="-122"/>
               </a:rPr>
-              <a:t>国家信息中心经济预测部政策仿真实验室</a:t>
+              <a:t>国家信息中心</a:t>
             </a:r>
             <a:endParaRPr lang="zh-CN" b="1" dirty="0">
               <a:solidFill>
